--- a/public/fun/pack/pptx/newspro/카드뉴스프리미엄_42_건강·안심습관_제이드실버.pptx
+++ b/public/fun/pack/pptx/newspro/카드뉴스프리미엄_42_건강·안심습관_제이드실버.pptx
@@ -113,12 +113,12 @@
   <p:extLst>
     <p:ext uri="{521415D9-36F7-43E2-AB2F-B90AF26B5E84}">
       <p14:sectionLst xmlns:p14="http://schemas.microsoft.com/office/powerpoint/2010/main">
-        <p14:section name="시작" id="{408542BB-CEBE-478B-872B-D6E00CE6CC10}">
+        <p14:section name="시작" id="{88D30A32-48C9-40B7-B279-8EC7E8A9C43B}">
           <p14:sldIdLst>
             <p14:sldId id="256"/>
           </p14:sldIdLst>
         </p14:section>
-        <p14:section name="본문" id="{6A88D71E-F65C-44AB-99EC-CE0A51DBC4A1}">
+        <p14:section name="본문" id="{FFDACA0D-37B1-423E-B226-4178377FE99D}">
           <p14:sldIdLst>
             <p14:sldId id="257"/>
             <p14:sldId id="258"/>
@@ -127,7 +127,7 @@
             <p14:sldId id="261"/>
           </p14:sldIdLst>
         </p14:section>
-        <p14:section name="마무리" id="{390A5FE1-7107-45F2-806C-51F4DBAAE9C7}">
+        <p14:section name="마무리" id="{331243AC-CA45-4B23-A2BB-75E590EEC80E}">
           <p14:sldIdLst>
             <p14:sldId id="262"/>
           </p14:sldIdLst>
@@ -1490,7 +1490,7 @@
             </a:lvl1pPr>
           </a:lstStyle>
           <a:p>
-            <a:fld id="{002AE31E-AED2-4E8D-A1F4-D52EAE39947B}" type="slidenum">
+            <a:fld id="{233E9409-DA8B-4A26-A4DB-CBEA40FCD237}" type="slidenum">
               <a:rPr lang="en-US"/>
               <a:t>‹#›</a:t>
             </a:fld>
@@ -2143,7 +2143,7 @@
             </a:lvl1pPr>
           </a:lstStyle>
           <a:p>
-            <a:fld id="{EF244BA2-04B8-4D67-9644-49A09A0A7031}" type="slidenum">
+            <a:fld id="{B812BBFC-08E9-46EB-B95D-1DAE296CEE5D}" type="slidenum">
               <a:rPr lang="en-US"/>
               <a:t>‹#›</a:t>
             </a:fld>
@@ -2827,7 +2827,7 @@
             </a:lvl1pPr>
           </a:lstStyle>
           <a:p>
-            <a:fld id="{28A05475-4B43-4A85-8D3A-C8BC670FB93E}" type="slidenum">
+            <a:fld id="{B6478139-1B1B-403A-8441-CEE98F61E5FB}" type="slidenum">
               <a:rPr lang="en-US"/>
               <a:t>‹#›</a:t>
             </a:fld>
@@ -3628,7 +3628,7 @@
           <a:p>
             <a:r>
               <a:rPr lang="ko-KR"/>
-              <a:t>겨울철 빙판길 조심하세요</a:t>
+              <a:t>미끄러운 길 조심하세요</a:t>
             </a:r>
           </a:p>
         </p:txBody>
@@ -3757,7 +3757,7 @@
           <a:bodyPr/>
           <a:lstStyle/>
           <a:p>
-            <a:fld id="{C21F3DF6-8AF4-4B81-9462-94787C367772}" type="slidenum">
+            <a:fld id="{AF4E8A70-0496-4032-94D2-380B4652DD83}" type="slidenum">
               <a:rPr lang="en-US"/>
               <a:t>‹#›</a:t>
             </a:fld>
@@ -3923,7 +3923,7 @@
           <a:bodyPr/>
           <a:lstStyle/>
           <a:p>
-            <a:fld id="{C73E536A-501E-4E27-9F2B-06733C135217}" type="slidenum">
+            <a:fld id="{87E298AE-83BE-40E2-9F8B-1502870C0B8B}" type="slidenum">
               <a:rPr lang="en-US"/>
               <a:t>‹#›</a:t>
             </a:fld>
@@ -4089,7 +4089,7 @@
           <a:bodyPr/>
           <a:lstStyle/>
           <a:p>
-            <a:fld id="{369042D6-E432-4A4E-B219-ADB6AEF3EE16}" type="slidenum">
+            <a:fld id="{5049E049-5BE0-48B0-BC40-D1BDD75C6C7E}" type="slidenum">
               <a:rPr lang="en-US"/>
               <a:t>‹#›</a:t>
             </a:fld>
@@ -4255,7 +4255,7 @@
           <a:bodyPr/>
           <a:lstStyle/>
           <a:p>
-            <a:fld id="{33452CDC-13F0-4BD8-ACD3-356DD9DEB523}" type="slidenum">
+            <a:fld id="{FEE88C7C-4350-4B0D-A4EC-D207CFAA0524}" type="slidenum">
               <a:rPr lang="en-US"/>
               <a:t>‹#›</a:t>
             </a:fld>
@@ -4421,7 +4421,7 @@
           <a:bodyPr/>
           <a:lstStyle/>
           <a:p>
-            <a:fld id="{9CC8BCDA-3F0E-4362-880C-6FFF2E634D0C}" type="slidenum">
+            <a:fld id="{F670B7C1-E5BE-4D70-9FEC-8BB25BC1D6E5}" type="slidenum">
               <a:rPr lang="en-US"/>
               <a:t>‹#›</a:t>
             </a:fld>
